--- a/documentation/Session 3.pptx
+++ b/documentation/Session 3.pptx
@@ -24,8 +24,8 @@
     <p:sldId id="635" r:id="rId15"/>
     <p:sldId id="639" r:id="rId16"/>
     <p:sldId id="619" r:id="rId17"/>
-    <p:sldId id="641" r:id="rId18"/>
-    <p:sldId id="594" r:id="rId19"/>
+    <p:sldId id="643" r:id="rId18"/>
+    <p:sldId id="641" r:id="rId19"/>
   </p:sldIdLst>
   <p:sldSz cx="9144000" cy="5143500" type="screen16x9"/>
   <p:notesSz cx="6858000" cy="9144000"/>
@@ -299,8 +299,8 @@
         </p14:section>
         <p14:section name="Homework" id="{1DEB8295-EB72-4438-859C-56B54CDA8C7A}">
           <p14:sldIdLst>
+            <p14:sldId id="643"/>
             <p14:sldId id="641"/>
-            <p14:sldId id="594"/>
           </p14:sldIdLst>
         </p14:section>
       </p14:sectionLst>
@@ -2134,7 +2134,13 @@
   <p:cSld>
     <p:spTree>
       <p:nvGrpSpPr>
-        <p:cNvPr id="1" name="Shape 92"/>
+        <p:cNvPr id="1" name="Shape 92">
+          <a:extLst>
+            <a:ext uri="{FF2B5EF4-FFF2-40B4-BE49-F238E27FC236}">
+              <a16:creationId xmlns:a16="http://schemas.microsoft.com/office/drawing/2014/main" id="{E5ACAB7D-DA14-8ED0-8B5D-958158236890}"/>
+            </a:ext>
+          </a:extLst>
+        </p:cNvPr>
         <p:cNvGrpSpPr/>
         <p:nvPr/>
       </p:nvGrpSpPr>
@@ -2148,7 +2154,13 @@
       </p:grpSpPr>
       <p:sp>
         <p:nvSpPr>
-          <p:cNvPr id="93" name="Google Shape;93;g60fe2f7717_0_102:notes"/>
+          <p:cNvPr id="93" name="Google Shape;93;g60fe2f7717_0_102:notes">
+            <a:extLst>
+              <a:ext uri="{FF2B5EF4-FFF2-40B4-BE49-F238E27FC236}">
+                <a16:creationId xmlns:a16="http://schemas.microsoft.com/office/drawing/2014/main" id="{B000158C-C399-43A7-20D3-150881841B74}"/>
+              </a:ext>
+            </a:extLst>
+          </p:cNvPr>
           <p:cNvSpPr>
             <a:spLocks noGrp="1" noRot="1" noChangeAspect="1"/>
           </p:cNvSpPr>
@@ -2189,7 +2201,13 @@
       </p:sp>
       <p:sp>
         <p:nvSpPr>
-          <p:cNvPr id="94" name="Google Shape;94;g60fe2f7717_0_102:notes"/>
+          <p:cNvPr id="94" name="Google Shape;94;g60fe2f7717_0_102:notes">
+            <a:extLst>
+              <a:ext uri="{FF2B5EF4-FFF2-40B4-BE49-F238E27FC236}">
+                <a16:creationId xmlns:a16="http://schemas.microsoft.com/office/drawing/2014/main" id="{327E0395-061E-98B8-58E1-AF4D2A66F723}"/>
+              </a:ext>
+            </a:extLst>
+          </p:cNvPr>
           <p:cNvSpPr txBox="1">
             <a:spLocks noGrp="1"/>
           </p:cNvSpPr>
@@ -2221,6 +2239,461 @@
               </a:spcAft>
               <a:buNone/>
             </a:pPr>
+            <a:r>
+              <a:rPr lang="en-US" dirty="0"/>
+              <a:t>With any experiment-based project it is important to </a:t>
+            </a:r>
+            <a:r>
+              <a:rPr lang="en-US" dirty="0" err="1"/>
+              <a:t>criticially</a:t>
+            </a:r>
+            <a:r>
+              <a:rPr lang="en-US" dirty="0"/>
+              <a:t> reflect on the outcome. Of course, a lot of the design decisions in this example project have been made with the goal to organize a learning unit in mind and may have been done differently in a different context. Let’s ignore the learning unit part for now and just look at this from point of view of a machine learning project and answer a few questions:</a:t>
+            </a:r>
+          </a:p>
+          <a:p>
+            <a:pPr marL="0" lvl="0" indent="0" algn="l" rtl="0">
+              <a:spcBef>
+                <a:spcPts val="0"/>
+              </a:spcBef>
+              <a:spcAft>
+                <a:spcPts val="0"/>
+              </a:spcAft>
+              <a:buNone/>
+            </a:pPr>
+            <a:endParaRPr lang="en-US" dirty="0"/>
+          </a:p>
+          <a:p>
+            <a:pPr marL="0" lvl="0" indent="0" algn="l" rtl="0">
+              <a:spcBef>
+                <a:spcPts val="0"/>
+              </a:spcBef>
+              <a:spcAft>
+                <a:spcPts val="0"/>
+              </a:spcAft>
+              <a:buNone/>
+            </a:pPr>
+            <a:r>
+              <a:rPr lang="en-US" b="1" dirty="0"/>
+              <a:t>Are the results achieved good?</a:t>
+            </a:r>
+          </a:p>
+          <a:p>
+            <a:pPr marL="0" lvl="0" indent="0" algn="l" rtl="0">
+              <a:spcBef>
+                <a:spcPts val="0"/>
+              </a:spcBef>
+              <a:spcAft>
+                <a:spcPts val="0"/>
+              </a:spcAft>
+              <a:buNone/>
+            </a:pPr>
+            <a:r>
+              <a:rPr lang="en-US" dirty="0"/>
+              <a:t>The achieved scores – both Hamming and F1 – indicate clear potential for improvement. It is safe to say that the result of the learning process would not be satisfactory if this was a model to be used in production.</a:t>
+            </a:r>
+          </a:p>
+          <a:p>
+            <a:pPr marL="0" lvl="0" indent="0" algn="l" rtl="0">
+              <a:spcBef>
+                <a:spcPts val="0"/>
+              </a:spcBef>
+              <a:spcAft>
+                <a:spcPts val="0"/>
+              </a:spcAft>
+              <a:buNone/>
+            </a:pPr>
+            <a:endParaRPr lang="en-US" dirty="0"/>
+          </a:p>
+          <a:p>
+            <a:pPr marL="0" lvl="0" indent="0" algn="l" rtl="0">
+              <a:spcBef>
+                <a:spcPts val="0"/>
+              </a:spcBef>
+              <a:spcAft>
+                <a:spcPts val="0"/>
+              </a:spcAft>
+              <a:buNone/>
+            </a:pPr>
+            <a:endParaRPr lang="en-US" dirty="0"/>
+          </a:p>
+          <a:p>
+            <a:pPr marL="0" lvl="0" indent="0" algn="l" rtl="0">
+              <a:spcBef>
+                <a:spcPts val="0"/>
+              </a:spcBef>
+              <a:spcAft>
+                <a:spcPts val="0"/>
+              </a:spcAft>
+              <a:buNone/>
+            </a:pPr>
+            <a:r>
+              <a:rPr lang="en-US" b="1" dirty="0"/>
+              <a:t>Which aspects of the project could be improved?</a:t>
+            </a:r>
+          </a:p>
+          <a:p>
+            <a:pPr marL="0" lvl="0" indent="0" algn="l" rtl="0">
+              <a:spcBef>
+                <a:spcPts val="0"/>
+              </a:spcBef>
+              <a:spcAft>
+                <a:spcPts val="0"/>
+              </a:spcAft>
+              <a:buNone/>
+            </a:pPr>
+            <a:r>
+              <a:rPr lang="en-US" dirty="0"/>
+              <a:t>There are several aspects that could be improved in this project:</a:t>
+            </a:r>
+          </a:p>
+          <a:p>
+            <a:pPr marL="171450" lvl="0" indent="-171450" algn="l" rtl="0">
+              <a:spcBef>
+                <a:spcPts val="0"/>
+              </a:spcBef>
+              <a:spcAft>
+                <a:spcPts val="0"/>
+              </a:spcAft>
+              <a:buFontTx/>
+              <a:buChar char="-"/>
+            </a:pPr>
+            <a:r>
+              <a:rPr lang="en-US" dirty="0"/>
+              <a:t>The data collection is the most obvious one. With only a few hundred images and only a single image per </a:t>
+            </a:r>
+            <a:r>
+              <a:rPr lang="en-US" dirty="0" err="1"/>
+              <a:t>Pokemon</a:t>
+            </a:r>
+            <a:r>
+              <a:rPr lang="en-US" dirty="0"/>
+              <a:t>, the dataset does not give us a good foundation to learn from. It is very likely, that the data itself is not sufficient to learn from. </a:t>
+            </a:r>
+          </a:p>
+          <a:p>
+            <a:pPr marL="171450" lvl="0" indent="-171450" algn="l" rtl="0">
+              <a:spcBef>
+                <a:spcPts val="0"/>
+              </a:spcBef>
+              <a:spcAft>
+                <a:spcPts val="0"/>
+              </a:spcAft>
+              <a:buFontTx/>
+              <a:buChar char="-"/>
+            </a:pPr>
+            <a:r>
+              <a:rPr lang="en-US" dirty="0"/>
+              <a:t>The problem modeling could also be improved. For this project we have assumed that we learn all relevant patterns from the visual image alone and don’t use any additional features. This assumption could be questioned.</a:t>
+            </a:r>
+          </a:p>
+          <a:p>
+            <a:pPr marL="171450" lvl="0" indent="-171450" algn="l" rtl="0">
+              <a:spcBef>
+                <a:spcPts val="0"/>
+              </a:spcBef>
+              <a:spcAft>
+                <a:spcPts val="0"/>
+              </a:spcAft>
+              <a:buFontTx/>
+              <a:buChar char="-"/>
+            </a:pPr>
+            <a:r>
+              <a:rPr lang="en-US" dirty="0"/>
+              <a:t>We could also try a larger variety of models and include some of the more complex models that have been excluded in this test.</a:t>
+            </a:r>
+          </a:p>
+          <a:p>
+            <a:pPr marL="171450" lvl="0" indent="-171450" algn="l" rtl="0">
+              <a:spcBef>
+                <a:spcPts val="0"/>
+              </a:spcBef>
+              <a:spcAft>
+                <a:spcPts val="0"/>
+              </a:spcAft>
+              <a:buFontTx/>
+              <a:buChar char="-"/>
+            </a:pPr>
+            <a:endParaRPr lang="en-US" dirty="0"/>
+          </a:p>
+          <a:p>
+            <a:pPr marL="0" lvl="0" indent="0" algn="l" rtl="0">
+              <a:spcBef>
+                <a:spcPts val="0"/>
+              </a:spcBef>
+              <a:spcAft>
+                <a:spcPts val="0"/>
+              </a:spcAft>
+              <a:buFontTx/>
+              <a:buNone/>
+            </a:pPr>
+            <a:r>
+              <a:rPr lang="en-US" b="1" dirty="0"/>
+              <a:t>How could the data collection be improved?</a:t>
+            </a:r>
+          </a:p>
+          <a:p>
+            <a:pPr marL="0" lvl="0" indent="0" algn="l" rtl="0">
+              <a:spcBef>
+                <a:spcPts val="0"/>
+              </a:spcBef>
+              <a:spcAft>
+                <a:spcPts val="0"/>
+              </a:spcAft>
+              <a:buFontTx/>
+              <a:buNone/>
+            </a:pPr>
+            <a:r>
+              <a:rPr lang="en-US" dirty="0"/>
+              <a:t>While we cannot increase the number of </a:t>
+            </a:r>
+            <a:r>
+              <a:rPr lang="en-US" dirty="0" err="1"/>
+              <a:t>Pokemon</a:t>
+            </a:r>
+            <a:r>
+              <a:rPr lang="en-US" dirty="0"/>
+              <a:t> drastically (at the time of writing there are 1200 </a:t>
+            </a:r>
+            <a:r>
+              <a:rPr lang="en-US" dirty="0" err="1"/>
+              <a:t>Pokemon</a:t>
+            </a:r>
+            <a:r>
+              <a:rPr lang="en-US" dirty="0"/>
+              <a:t>), it could be possible to collect more images per </a:t>
+            </a:r>
+            <a:r>
+              <a:rPr lang="en-US" dirty="0" err="1"/>
+              <a:t>Pokemon</a:t>
+            </a:r>
+            <a:r>
+              <a:rPr lang="en-US" dirty="0"/>
+              <a:t>. This could help us gain additional variety for the dataset which may be helpful for the model to learn patterns. The fact that images in different datasets are likely tagged with the </a:t>
+            </a:r>
+            <a:r>
+              <a:rPr lang="en-US" dirty="0" err="1"/>
+              <a:t>pokemon</a:t>
+            </a:r>
+            <a:r>
+              <a:rPr lang="en-US" dirty="0"/>
+              <a:t> should make it possible to merge different datasets. This will likely require us to deal with different images sizes, formats and aspect ratios.</a:t>
+            </a:r>
+          </a:p>
+          <a:p>
+            <a:pPr marL="0" lvl="0" indent="0" algn="l" rtl="0">
+              <a:spcBef>
+                <a:spcPts val="0"/>
+              </a:spcBef>
+              <a:spcAft>
+                <a:spcPts val="0"/>
+              </a:spcAft>
+              <a:buFontTx/>
+              <a:buNone/>
+            </a:pPr>
+            <a:r>
+              <a:rPr lang="en-US" dirty="0"/>
+              <a:t>One aspect that will become more crucial if this is done is not to bias the test set accidentally. It is probably a good idea to split by </a:t>
+            </a:r>
+            <a:r>
+              <a:rPr lang="en-US" dirty="0" err="1"/>
+              <a:t>Pokemon</a:t>
+            </a:r>
+            <a:r>
+              <a:rPr lang="en-US" dirty="0"/>
+              <a:t> and not by image, to avoid having, images of the same </a:t>
+            </a:r>
+            <a:r>
+              <a:rPr lang="en-US" dirty="0" err="1"/>
+              <a:t>pokemon</a:t>
+            </a:r>
+            <a:r>
+              <a:rPr lang="en-US" dirty="0"/>
+              <a:t> within both the training and validation data.</a:t>
+            </a:r>
+          </a:p>
+          <a:p>
+            <a:pPr marL="0" lvl="0" indent="0" algn="l" rtl="0">
+              <a:spcBef>
+                <a:spcPts val="0"/>
+              </a:spcBef>
+              <a:spcAft>
+                <a:spcPts val="0"/>
+              </a:spcAft>
+              <a:buFontTx/>
+              <a:buNone/>
+            </a:pPr>
+            <a:endParaRPr lang="en-US" dirty="0"/>
+          </a:p>
+          <a:p>
+            <a:pPr marL="0" marR="0" lvl="0" indent="0" algn="l" defTabSz="914400" rtl="0" eaLnBrk="1" fontAlgn="auto" latinLnBrk="0" hangingPunct="1">
+              <a:lnSpc>
+                <a:spcPct val="100000"/>
+              </a:lnSpc>
+              <a:spcBef>
+                <a:spcPts val="0"/>
+              </a:spcBef>
+              <a:spcAft>
+                <a:spcPts val="0"/>
+              </a:spcAft>
+              <a:buClr>
+                <a:srgbClr val="000000"/>
+              </a:buClr>
+              <a:buSzPts val="1100"/>
+              <a:buFontTx/>
+              <a:buNone/>
+              <a:tabLst/>
+              <a:defRPr/>
+            </a:pPr>
+            <a:r>
+              <a:rPr lang="en-US" sz="1100" b="1" dirty="0">
+                <a:solidFill>
+                  <a:schemeClr val="tx1"/>
+                </a:solidFill>
+              </a:rPr>
+              <a:t>How could the machine learning problem be modelled differently?</a:t>
+            </a:r>
+          </a:p>
+          <a:p>
+            <a:pPr marL="0" lvl="0" indent="0" algn="l" rtl="0">
+              <a:spcBef>
+                <a:spcPts val="0"/>
+              </a:spcBef>
+              <a:spcAft>
+                <a:spcPts val="0"/>
+              </a:spcAft>
+              <a:buFontTx/>
+              <a:buNone/>
+            </a:pPr>
+            <a:r>
+              <a:rPr lang="en-US" dirty="0"/>
+              <a:t>It would be worth it to check if feature engineering can help with the classification. A lot of the </a:t>
+            </a:r>
+            <a:r>
+              <a:rPr lang="en-US" dirty="0" err="1"/>
+              <a:t>Pokemon</a:t>
+            </a:r>
+            <a:r>
+              <a:rPr lang="en-US" dirty="0"/>
+              <a:t> types correlate heavily with color schemes (e.g., fire being based on red, orange and yellow colors). It may be worth it to see if we can engineer features that represent the dominance of colors, the ratio of colors, the color temperature or similar aspects of the image.</a:t>
+            </a:r>
+          </a:p>
+          <a:p>
+            <a:pPr marL="0" lvl="0" indent="0" algn="l" rtl="0">
+              <a:spcBef>
+                <a:spcPts val="0"/>
+              </a:spcBef>
+              <a:spcAft>
+                <a:spcPts val="0"/>
+              </a:spcAft>
+              <a:buFontTx/>
+              <a:buNone/>
+            </a:pPr>
+            <a:endParaRPr lang="en-US" dirty="0"/>
+          </a:p>
+          <a:p>
+            <a:pPr marL="0" lvl="0" indent="0" algn="l" rtl="0">
+              <a:spcBef>
+                <a:spcPts val="0"/>
+              </a:spcBef>
+              <a:spcAft>
+                <a:spcPts val="0"/>
+              </a:spcAft>
+              <a:buFontTx/>
+              <a:buNone/>
+            </a:pPr>
+            <a:endParaRPr lang="en-US" dirty="0"/>
+          </a:p>
+          <a:p>
+            <a:pPr marL="0" marR="0" lvl="0" indent="0" algn="l" defTabSz="914400" rtl="0" eaLnBrk="1" fontAlgn="auto" latinLnBrk="0" hangingPunct="1">
+              <a:lnSpc>
+                <a:spcPct val="100000"/>
+              </a:lnSpc>
+              <a:spcBef>
+                <a:spcPts val="0"/>
+              </a:spcBef>
+              <a:spcAft>
+                <a:spcPts val="0"/>
+              </a:spcAft>
+              <a:buClr>
+                <a:srgbClr val="000000"/>
+              </a:buClr>
+              <a:buSzPts val="1100"/>
+              <a:buFontTx/>
+              <a:buNone/>
+              <a:tabLst/>
+              <a:defRPr/>
+            </a:pPr>
+            <a:r>
+              <a:rPr lang="en-US" sz="1100" b="1" dirty="0">
+                <a:solidFill>
+                  <a:schemeClr val="tx1"/>
+                </a:solidFill>
+              </a:rPr>
+              <a:t>How could the model be improved?</a:t>
+            </a:r>
+            <a:endParaRPr lang="en-US" sz="1050" b="1" dirty="0">
+              <a:solidFill>
+                <a:srgbClr val="72AF2F"/>
+              </a:solidFill>
+            </a:endParaRPr>
+          </a:p>
+          <a:p>
+            <a:pPr marL="0" lvl="0" indent="0" algn="l" rtl="0">
+              <a:spcBef>
+                <a:spcPts val="0"/>
+              </a:spcBef>
+              <a:spcAft>
+                <a:spcPts val="0"/>
+              </a:spcAft>
+              <a:buFontTx/>
+              <a:buNone/>
+            </a:pPr>
+            <a:r>
+              <a:rPr lang="en-US" dirty="0"/>
+              <a:t>There are some more complex image classification models that we have not tried in this experiment. For example, a residual network may be a viable alternative to a standard convolutional neural network. It is likely that more complex networks also require more data, so this should be in conjunction with efforts to improve the dataset.</a:t>
+            </a:r>
+          </a:p>
+          <a:p>
+            <a:pPr marL="0" lvl="0" indent="0" algn="l" rtl="0">
+              <a:spcBef>
+                <a:spcPts val="0"/>
+              </a:spcBef>
+              <a:spcAft>
+                <a:spcPts val="0"/>
+              </a:spcAft>
+              <a:buFontTx/>
+              <a:buNone/>
+            </a:pPr>
+            <a:r>
+              <a:rPr lang="en-US" dirty="0"/>
+              <a:t>One way to learn despite the low amount of data could be to use transfer learning. This would mean using an image classification network that has been trained on a similar purpose – maybe one for general image classification or one specialized on anime image datasets – and training it for the </a:t>
+            </a:r>
+            <a:r>
+              <a:rPr lang="en-US" dirty="0" err="1"/>
+              <a:t>Pokemon</a:t>
+            </a:r>
+            <a:r>
+              <a:rPr lang="en-US" dirty="0"/>
+              <a:t> classification task. The hope is that the patterns already encoded in this network from the previous task are also </a:t>
+            </a:r>
+            <a:r>
+              <a:rPr lang="en-US"/>
+              <a:t>helpful for our problem.</a:t>
+            </a:r>
+            <a:endParaRPr lang="en-US" dirty="0"/>
+          </a:p>
+          <a:p>
+            <a:pPr marL="0" lvl="0" indent="0" algn="l" rtl="0">
+              <a:spcBef>
+                <a:spcPts val="0"/>
+              </a:spcBef>
+              <a:spcAft>
+                <a:spcPts val="0"/>
+              </a:spcAft>
+              <a:buNone/>
+            </a:pPr>
             <a:endParaRPr dirty="0"/>
           </a:p>
         </p:txBody>
@@ -2228,7 +2701,7 @@
     </p:spTree>
     <p:extLst>
       <p:ext uri="{BB962C8B-B14F-4D97-AF65-F5344CB8AC3E}">
-        <p14:creationId xmlns:p14="http://schemas.microsoft.com/office/powerpoint/2010/main" val="2305560645"/>
+        <p14:creationId xmlns:p14="http://schemas.microsoft.com/office/powerpoint/2010/main" val="3319628505"/>
       </p:ext>
     </p:extLst>
   </p:cSld>
@@ -2337,7 +2810,7 @@
     </p:spTree>
     <p:extLst>
       <p:ext uri="{BB962C8B-B14F-4D97-AF65-F5344CB8AC3E}">
-        <p14:creationId xmlns:p14="http://schemas.microsoft.com/office/powerpoint/2010/main" val="1695909450"/>
+        <p14:creationId xmlns:p14="http://schemas.microsoft.com/office/powerpoint/2010/main" val="2305560645"/>
       </p:ext>
     </p:extLst>
   </p:cSld>
@@ -9989,15 +10462,219 @@
                                   </p:childTnLst>
                                 </p:cTn>
                               </p:par>
+                            </p:childTnLst>
+                          </p:cTn>
+                        </p:par>
+                      </p:childTnLst>
+                    </p:cTn>
+                  </p:par>
+                  <p:par>
+                    <p:cTn id="21" fill="hold">
+                      <p:stCondLst>
+                        <p:cond delay="indefinite"/>
+                      </p:stCondLst>
+                      <p:childTnLst>
+                        <p:par>
+                          <p:cTn id="22" fill="hold">
+                            <p:stCondLst>
+                              <p:cond delay="0"/>
+                            </p:stCondLst>
+                            <p:childTnLst>
                               <p:par>
-                                <p:cTn id="21" presetID="1" presetClass="exit" presetSubtype="0" fill="hold" grpId="0" nodeType="withEffect">
+                                <p:cTn id="23" presetID="1" presetClass="exit" presetSubtype="0" fill="hold" grpId="0" nodeType="clickEffect">
                                   <p:stCondLst>
                                     <p:cond delay="0"/>
                                   </p:stCondLst>
                                   <p:childTnLst>
                                     <p:set>
                                       <p:cBhvr>
-                                        <p:cTn id="22" dur="1" fill="hold">
+                                        <p:cTn id="24" dur="1" fill="hold">
+                                          <p:stCondLst>
+                                            <p:cond delay="0"/>
+                                          </p:stCondLst>
+                                        </p:cTn>
+                                        <p:tgtEl>
+                                          <p:spTgt spid="9">
+                                            <p:txEl>
+                                              <p:pRg st="0" end="0"/>
+                                            </p:txEl>
+                                          </p:spTgt>
+                                        </p:tgtEl>
+                                        <p:attrNameLst>
+                                          <p:attrName>style.visibility</p:attrName>
+                                        </p:attrNameLst>
+                                      </p:cBhvr>
+                                      <p:to>
+                                        <p:strVal val="hidden"/>
+                                      </p:to>
+                                    </p:set>
+                                  </p:childTnLst>
+                                </p:cTn>
+                              </p:par>
+                              <p:par>
+                                <p:cTn id="25" presetID="1" presetClass="exit" presetSubtype="0" fill="hold" grpId="0" nodeType="withEffect">
+                                  <p:stCondLst>
+                                    <p:cond delay="0"/>
+                                  </p:stCondLst>
+                                  <p:childTnLst>
+                                    <p:set>
+                                      <p:cBhvr>
+                                        <p:cTn id="26" dur="1" fill="hold">
+                                          <p:stCondLst>
+                                            <p:cond delay="0"/>
+                                          </p:stCondLst>
+                                        </p:cTn>
+                                        <p:tgtEl>
+                                          <p:spTgt spid="9">
+                                            <p:txEl>
+                                              <p:pRg st="1" end="1"/>
+                                            </p:txEl>
+                                          </p:spTgt>
+                                        </p:tgtEl>
+                                        <p:attrNameLst>
+                                          <p:attrName>style.visibility</p:attrName>
+                                        </p:attrNameLst>
+                                      </p:cBhvr>
+                                      <p:to>
+                                        <p:strVal val="hidden"/>
+                                      </p:to>
+                                    </p:set>
+                                  </p:childTnLst>
+                                </p:cTn>
+                              </p:par>
+                              <p:par>
+                                <p:cTn id="27" presetID="1" presetClass="exit" presetSubtype="0" fill="hold" grpId="0" nodeType="withEffect">
+                                  <p:stCondLst>
+                                    <p:cond delay="0"/>
+                                  </p:stCondLst>
+                                  <p:childTnLst>
+                                    <p:set>
+                                      <p:cBhvr>
+                                        <p:cTn id="28" dur="1" fill="hold">
+                                          <p:stCondLst>
+                                            <p:cond delay="0"/>
+                                          </p:stCondLst>
+                                        </p:cTn>
+                                        <p:tgtEl>
+                                          <p:spTgt spid="9">
+                                            <p:txEl>
+                                              <p:pRg st="2" end="2"/>
+                                            </p:txEl>
+                                          </p:spTgt>
+                                        </p:tgtEl>
+                                        <p:attrNameLst>
+                                          <p:attrName>style.visibility</p:attrName>
+                                        </p:attrNameLst>
+                                      </p:cBhvr>
+                                      <p:to>
+                                        <p:strVal val="hidden"/>
+                                      </p:to>
+                                    </p:set>
+                                  </p:childTnLst>
+                                </p:cTn>
+                              </p:par>
+                              <p:par>
+                                <p:cTn id="29" presetID="1" presetClass="exit" presetSubtype="0" fill="hold" grpId="0" nodeType="withEffect">
+                                  <p:stCondLst>
+                                    <p:cond delay="0"/>
+                                  </p:stCondLst>
+                                  <p:childTnLst>
+                                    <p:set>
+                                      <p:cBhvr>
+                                        <p:cTn id="30" dur="1" fill="hold">
+                                          <p:stCondLst>
+                                            <p:cond delay="0"/>
+                                          </p:stCondLst>
+                                        </p:cTn>
+                                        <p:tgtEl>
+                                          <p:spTgt spid="9">
+                                            <p:txEl>
+                                              <p:pRg st="3" end="3"/>
+                                            </p:txEl>
+                                          </p:spTgt>
+                                        </p:tgtEl>
+                                        <p:attrNameLst>
+                                          <p:attrName>style.visibility</p:attrName>
+                                        </p:attrNameLst>
+                                      </p:cBhvr>
+                                      <p:to>
+                                        <p:strVal val="hidden"/>
+                                      </p:to>
+                                    </p:set>
+                                  </p:childTnLst>
+                                </p:cTn>
+                              </p:par>
+                              <p:par>
+                                <p:cTn id="31" presetID="1" presetClass="exit" presetSubtype="0" fill="hold" grpId="0" nodeType="withEffect">
+                                  <p:stCondLst>
+                                    <p:cond delay="0"/>
+                                  </p:stCondLst>
+                                  <p:childTnLst>
+                                    <p:set>
+                                      <p:cBhvr>
+                                        <p:cTn id="32" dur="1" fill="hold">
+                                          <p:stCondLst>
+                                            <p:cond delay="0"/>
+                                          </p:stCondLst>
+                                        </p:cTn>
+                                        <p:tgtEl>
+                                          <p:spTgt spid="9">
+                                            <p:txEl>
+                                              <p:pRg st="4" end="4"/>
+                                            </p:txEl>
+                                          </p:spTgt>
+                                        </p:tgtEl>
+                                        <p:attrNameLst>
+                                          <p:attrName>style.visibility</p:attrName>
+                                        </p:attrNameLst>
+                                      </p:cBhvr>
+                                      <p:to>
+                                        <p:strVal val="hidden"/>
+                                      </p:to>
+                                    </p:set>
+                                  </p:childTnLst>
+                                </p:cTn>
+                              </p:par>
+                              <p:par>
+                                <p:cTn id="33" presetID="1" presetClass="exit" presetSubtype="0" fill="hold" grpId="0" nodeType="withEffect">
+                                  <p:stCondLst>
+                                    <p:cond delay="0"/>
+                                  </p:stCondLst>
+                                  <p:childTnLst>
+                                    <p:set>
+                                      <p:cBhvr>
+                                        <p:cTn id="34" dur="1" fill="hold">
+                                          <p:stCondLst>
+                                            <p:cond delay="0"/>
+                                          </p:stCondLst>
+                                        </p:cTn>
+                                        <p:tgtEl>
+                                          <p:spTgt spid="9">
+                                            <p:txEl>
+                                              <p:pRg st="6" end="6"/>
+                                            </p:txEl>
+                                          </p:spTgt>
+                                        </p:tgtEl>
+                                        <p:attrNameLst>
+                                          <p:attrName>style.visibility</p:attrName>
+                                        </p:attrNameLst>
+                                      </p:cBhvr>
+                                      <p:to>
+                                        <p:strVal val="hidden"/>
+                                      </p:to>
+                                    </p:set>
+                                  </p:childTnLst>
+                                </p:cTn>
+                              </p:par>
+                              <p:par>
+                                <p:cTn id="35" presetID="1" presetClass="exit" presetSubtype="0" fill="hold" grpId="1" nodeType="withEffect">
+                                  <p:stCondLst>
+                                    <p:cond delay="0"/>
+                                  </p:stCondLst>
+                                  <p:childTnLst>
+                                    <p:set>
+                                      <p:cBhvr>
+                                        <p:cTn id="36" dur="1" fill="hold">
                                           <p:stCondLst>
                                             <p:cond delay="0"/>
                                           </p:stCondLst>
@@ -10017,14 +10694,41 @@
                                 </p:cTn>
                               </p:par>
                               <p:par>
-                                <p:cTn id="23" presetID="42" presetClass="path" presetSubtype="0" accel="50000" decel="50000" fill="hold" nodeType="withEffect">
+                                <p:cTn id="37" presetID="1" presetClass="exit" presetSubtype="0" fill="hold" grpId="0" nodeType="withEffect">
+                                  <p:stCondLst>
+                                    <p:cond delay="0"/>
+                                  </p:stCondLst>
+                                  <p:childTnLst>
+                                    <p:set>
+                                      <p:cBhvr>
+                                        <p:cTn id="38" dur="1" fill="hold">
+                                          <p:stCondLst>
+                                            <p:cond delay="0"/>
+                                          </p:stCondLst>
+                                        </p:cTn>
+                                        <p:tgtEl>
+                                          <p:spTgt spid="3"/>
+                                        </p:tgtEl>
+                                        <p:attrNameLst>
+                                          <p:attrName>style.visibility</p:attrName>
+                                        </p:attrNameLst>
+                                      </p:cBhvr>
+                                      <p:to>
+                                        <p:strVal val="hidden"/>
+                                      </p:to>
+                                    </p:set>
+                                  </p:childTnLst>
+                                </p:cTn>
+                              </p:par>
+                              <p:par>
+                                <p:cTn id="39" presetID="42" presetClass="path" presetSubtype="0" accel="50000" decel="50000" fill="hold" nodeType="withEffect">
                                   <p:stCondLst>
                                     <p:cond delay="0"/>
                                   </p:stCondLst>
                                   <p:childTnLst>
                                     <p:animMotion origin="layout" path="M -1.94444E-6 0 L -0.5217 -0.00031 " pathEditMode="relative" rAng="0" ptsTypes="AA">
                                       <p:cBhvr>
-                                        <p:cTn id="24" dur="2000" fill="hold"/>
+                                        <p:cTn id="40" dur="2000" fill="hold"/>
                                         <p:tgtEl>
                                           <p:spTgt spid="2"/>
                                         </p:tgtEl>
@@ -10067,6 +10771,8 @@
     </p:tnLst>
     <p:bldLst>
       <p:bldP spid="3" grpId="0"/>
+      <p:bldP spid="3" grpId="1"/>
+      <p:bldP spid="9" grpId="0" uiExpand="1" build="p"/>
     </p:bldLst>
   </p:timing>
 </p:sld>
@@ -13649,7 +14355,13 @@
   <p:cSld>
     <p:spTree>
       <p:nvGrpSpPr>
-        <p:cNvPr id="1" name="Shape 95"/>
+        <p:cNvPr id="1" name="Shape 95">
+          <a:extLst>
+            <a:ext uri="{FF2B5EF4-FFF2-40B4-BE49-F238E27FC236}">
+              <a16:creationId xmlns:a16="http://schemas.microsoft.com/office/drawing/2014/main" id="{8014453B-BCAD-F2D0-ED0E-27E18B3785D0}"/>
+            </a:ext>
+          </a:extLst>
+        </p:cNvPr>
         <p:cNvGrpSpPr/>
         <p:nvPr/>
       </p:nvGrpSpPr>
@@ -13663,7 +14375,13 @@
       </p:grpSpPr>
       <p:sp>
         <p:nvSpPr>
-          <p:cNvPr id="96" name="Google Shape;96;p20"/>
+          <p:cNvPr id="96" name="Google Shape;96;p20">
+            <a:extLst>
+              <a:ext uri="{FF2B5EF4-FFF2-40B4-BE49-F238E27FC236}">
+                <a16:creationId xmlns:a16="http://schemas.microsoft.com/office/drawing/2014/main" id="{D06D2246-1A7D-351C-CB67-780F02276AEF}"/>
+              </a:ext>
+            </a:extLst>
+          </p:cNvPr>
           <p:cNvSpPr txBox="1">
             <a:spLocks noGrp="1"/>
           </p:cNvSpPr>
@@ -13700,7 +14418,7 @@
                 <a:latin typeface="Calibri" panose="020F0502020204030204" pitchFamily="34" charset="0"/>
                 <a:cs typeface="Calibri" panose="020F0502020204030204" pitchFamily="34" charset="0"/>
               </a:rPr>
-              <a:t>Please help us improve</a:t>
+              <a:t>Critical Reflection.</a:t>
             </a:r>
             <a:endParaRPr sz="3200" dirty="0">
               <a:latin typeface="Calibri" panose="020F0502020204030204" pitchFamily="34" charset="0"/>
@@ -13714,7 +14432,7 @@
           <p:cNvPr id="2" name="Google Shape;97;p20">
             <a:extLst>
               <a:ext uri="{FF2B5EF4-FFF2-40B4-BE49-F238E27FC236}">
-                <a16:creationId xmlns:a16="http://schemas.microsoft.com/office/drawing/2014/main" id="{DFE6C00B-A7A0-F0ED-113A-50EBACB698C4}"/>
+                <a16:creationId xmlns:a16="http://schemas.microsoft.com/office/drawing/2014/main" id="{0F9BD087-B0D5-6214-2763-CA30BF4B467D}"/>
               </a:ext>
             </a:extLst>
           </p:cNvPr>
@@ -13749,122 +14467,112 @@
                   <a:schemeClr val="tx1"/>
                 </a:solidFill>
               </a:rPr>
-              <a:t>LU Evaluation: Pinned to slack channel.</a:t>
+              <a:t>Are the results achieved in this project good?</a:t>
             </a:r>
           </a:p>
           <a:p>
             <a:pPr marL="114300" indent="0">
               <a:buNone/>
             </a:pPr>
+            <a:endParaRPr lang="en-US" sz="2200" dirty="0">
+              <a:solidFill>
+                <a:schemeClr val="tx1"/>
+              </a:solidFill>
+            </a:endParaRPr>
+          </a:p>
+          <a:p>
+            <a:pPr marL="114300" indent="0">
+              <a:buNone/>
+            </a:pPr>
+            <a:r>
+              <a:rPr lang="en-US" sz="2200" dirty="0">
+                <a:solidFill>
+                  <a:schemeClr val="tx1"/>
+                </a:solidFill>
+              </a:rPr>
+              <a:t>Which aspects of the project could be improved?</a:t>
+            </a:r>
+          </a:p>
+          <a:p>
+            <a:pPr marL="114300" indent="0">
+              <a:buNone/>
+            </a:pPr>
+            <a:endParaRPr lang="en-US" sz="2200" dirty="0">
+              <a:solidFill>
+                <a:schemeClr val="tx1"/>
+              </a:solidFill>
+            </a:endParaRPr>
+          </a:p>
+          <a:p>
+            <a:pPr marL="114300" indent="0">
+              <a:buNone/>
+            </a:pPr>
+            <a:r>
+              <a:rPr lang="en-US" sz="2200" dirty="0">
+                <a:solidFill>
+                  <a:schemeClr val="tx1"/>
+                </a:solidFill>
+              </a:rPr>
+              <a:t>How could the data collection be improved?</a:t>
+            </a:r>
+          </a:p>
+          <a:p>
+            <a:pPr marL="114300" indent="0">
+              <a:buNone/>
+            </a:pPr>
+            <a:endParaRPr lang="en-US" sz="2200" dirty="0">
+              <a:solidFill>
+                <a:schemeClr val="tx1"/>
+              </a:solidFill>
+            </a:endParaRPr>
+          </a:p>
+          <a:p>
+            <a:pPr marL="114300" indent="0">
+              <a:buNone/>
+            </a:pPr>
+            <a:r>
+              <a:rPr lang="en-US" sz="2200" dirty="0">
+                <a:solidFill>
+                  <a:schemeClr val="tx1"/>
+                </a:solidFill>
+              </a:rPr>
+              <a:t>How could the machine learning problem be modelled differently?</a:t>
+            </a:r>
+          </a:p>
+          <a:p>
+            <a:pPr marL="114300" indent="0">
+              <a:buNone/>
+            </a:pPr>
+            <a:endParaRPr lang="en-US" sz="2200" dirty="0">
+              <a:solidFill>
+                <a:schemeClr val="tx1"/>
+              </a:solidFill>
+            </a:endParaRPr>
+          </a:p>
+          <a:p>
+            <a:pPr marL="114300" indent="0">
+              <a:buNone/>
+            </a:pPr>
+            <a:r>
+              <a:rPr lang="en-US" sz="2200" dirty="0">
+                <a:solidFill>
+                  <a:schemeClr val="tx1"/>
+                </a:solidFill>
+              </a:rPr>
+              <a:t>How could the model be improved?</a:t>
+            </a:r>
             <a:endParaRPr lang="en-US" sz="2000" dirty="0">
               <a:solidFill>
                 <a:srgbClr val="72AF2F"/>
               </a:solidFill>
             </a:endParaRPr>
           </a:p>
-          <a:p>
-            <a:pPr marL="1074738" indent="0">
-              <a:buNone/>
-            </a:pPr>
-            <a:endParaRPr lang="en-US" sz="2000" dirty="0">
-              <a:solidFill>
-                <a:srgbClr val="72AF2F"/>
-              </a:solidFill>
-            </a:endParaRPr>
-          </a:p>
-        </p:txBody>
-      </p:sp>
-      <p:pic>
-        <p:nvPicPr>
-          <p:cNvPr id="5" name="Picture 4" descr="Graphical user interface, text, application&#10;&#10;Description automatically generated">
-            <a:extLst>
-              <a:ext uri="{FF2B5EF4-FFF2-40B4-BE49-F238E27FC236}">
-                <a16:creationId xmlns:a16="http://schemas.microsoft.com/office/drawing/2014/main" id="{A16AA5B0-8E38-EB6E-368A-70CED799CF31}"/>
-              </a:ext>
-            </a:extLst>
-          </p:cNvPr>
-          <p:cNvPicPr>
-            <a:picLocks noChangeAspect="1"/>
-          </p:cNvPicPr>
-          <p:nvPr/>
-        </p:nvPicPr>
-        <p:blipFill>
-          <a:blip r:embed="rId3"/>
-          <a:stretch>
-            <a:fillRect/>
-          </a:stretch>
-        </p:blipFill>
-        <p:spPr>
-          <a:xfrm>
-            <a:off x="3891138" y="1906256"/>
-            <a:ext cx="4285586" cy="2792219"/>
-          </a:xfrm>
-          <a:prstGeom prst="rect">
-            <a:avLst/>
-          </a:prstGeom>
-          <a:ln>
-            <a:solidFill>
-              <a:schemeClr val="tx1"/>
-            </a:solidFill>
-          </a:ln>
-        </p:spPr>
-      </p:pic>
-      <p:sp>
-        <p:nvSpPr>
-          <p:cNvPr id="6" name="Rectangle 5">
-            <a:extLst>
-              <a:ext uri="{FF2B5EF4-FFF2-40B4-BE49-F238E27FC236}">
-                <a16:creationId xmlns:a16="http://schemas.microsoft.com/office/drawing/2014/main" id="{0934B3E6-3E26-4958-881F-33D1C5A61A62}"/>
-              </a:ext>
-            </a:extLst>
-          </p:cNvPr>
-          <p:cNvSpPr/>
-          <p:nvPr/>
-        </p:nvSpPr>
-        <p:spPr>
-          <a:xfrm>
-            <a:off x="6356350" y="2273300"/>
-            <a:ext cx="971550" cy="298450"/>
-          </a:xfrm>
-          <a:prstGeom prst="rect">
-            <a:avLst/>
-          </a:prstGeom>
-          <a:noFill/>
-          <a:ln w="63500">
-            <a:solidFill>
-              <a:srgbClr val="FF0000"/>
-            </a:solidFill>
-          </a:ln>
-        </p:spPr>
-        <p:style>
-          <a:lnRef idx="2">
-            <a:schemeClr val="accent1">
-              <a:shade val="50000"/>
-            </a:schemeClr>
-          </a:lnRef>
-          <a:fillRef idx="1">
-            <a:schemeClr val="accent1"/>
-          </a:fillRef>
-          <a:effectRef idx="0">
-            <a:schemeClr val="accent1"/>
-          </a:effectRef>
-          <a:fontRef idx="minor">
-            <a:schemeClr val="lt1"/>
-          </a:fontRef>
-        </p:style>
-        <p:txBody>
-          <a:bodyPr rtlCol="0" anchor="ctr"/>
-          <a:lstStyle/>
-          <a:p>
-            <a:pPr algn="ctr"/>
-            <a:endParaRPr lang="en-DE"/>
-          </a:p>
         </p:txBody>
       </p:sp>
     </p:spTree>
     <p:extLst>
       <p:ext uri="{BB962C8B-B14F-4D97-AF65-F5344CB8AC3E}">
-        <p14:creationId xmlns:p14="http://schemas.microsoft.com/office/powerpoint/2010/main" val="2367668795"/>
+        <p14:creationId xmlns:p14="http://schemas.microsoft.com/office/powerpoint/2010/main" val="1450824876"/>
       </p:ext>
     </p:extLst>
   </p:cSld>
@@ -13874,6 +14582,232 @@
   <p:transition spd="slow">
     <p:push dir="d"/>
   </p:transition>
+  <p:timing>
+    <p:tnLst>
+      <p:par>
+        <p:cTn id="1" dur="indefinite" restart="never" nodeType="tmRoot">
+          <p:childTnLst>
+            <p:seq concurrent="1" nextAc="seek">
+              <p:cTn id="2" dur="indefinite" nodeType="mainSeq">
+                <p:childTnLst>
+                  <p:par>
+                    <p:cTn id="3" fill="hold">
+                      <p:stCondLst>
+                        <p:cond delay="indefinite"/>
+                      </p:stCondLst>
+                      <p:childTnLst>
+                        <p:par>
+                          <p:cTn id="4" fill="hold">
+                            <p:stCondLst>
+                              <p:cond delay="0"/>
+                            </p:stCondLst>
+                            <p:childTnLst>
+                              <p:par>
+                                <p:cTn id="5" presetID="1" presetClass="entr" presetSubtype="0" fill="hold" nodeType="clickEffect">
+                                  <p:stCondLst>
+                                    <p:cond delay="0"/>
+                                  </p:stCondLst>
+                                  <p:childTnLst>
+                                    <p:set>
+                                      <p:cBhvr>
+                                        <p:cTn id="6" dur="1" fill="hold">
+                                          <p:stCondLst>
+                                            <p:cond delay="0"/>
+                                          </p:stCondLst>
+                                        </p:cTn>
+                                        <p:tgtEl>
+                                          <p:spTgt spid="2">
+                                            <p:txEl>
+                                              <p:pRg st="2" end="2"/>
+                                            </p:txEl>
+                                          </p:spTgt>
+                                        </p:tgtEl>
+                                        <p:attrNameLst>
+                                          <p:attrName>style.visibility</p:attrName>
+                                        </p:attrNameLst>
+                                      </p:cBhvr>
+                                      <p:to>
+                                        <p:strVal val="visible"/>
+                                      </p:to>
+                                    </p:set>
+                                  </p:childTnLst>
+                                </p:cTn>
+                              </p:par>
+                            </p:childTnLst>
+                          </p:cTn>
+                        </p:par>
+                      </p:childTnLst>
+                    </p:cTn>
+                  </p:par>
+                  <p:par>
+                    <p:cTn id="7" fill="hold">
+                      <p:stCondLst>
+                        <p:cond delay="indefinite"/>
+                      </p:stCondLst>
+                      <p:childTnLst>
+                        <p:par>
+                          <p:cTn id="8" fill="hold">
+                            <p:stCondLst>
+                              <p:cond delay="0"/>
+                            </p:stCondLst>
+                            <p:childTnLst>
+                              <p:par>
+                                <p:cTn id="9" presetID="1" presetClass="entr" presetSubtype="0" fill="hold" nodeType="clickEffect">
+                                  <p:stCondLst>
+                                    <p:cond delay="0"/>
+                                  </p:stCondLst>
+                                  <p:childTnLst>
+                                    <p:set>
+                                      <p:cBhvr>
+                                        <p:cTn id="10" dur="1" fill="hold">
+                                          <p:stCondLst>
+                                            <p:cond delay="0"/>
+                                          </p:stCondLst>
+                                        </p:cTn>
+                                        <p:tgtEl>
+                                          <p:spTgt spid="2">
+                                            <p:txEl>
+                                              <p:pRg st="4" end="4"/>
+                                            </p:txEl>
+                                          </p:spTgt>
+                                        </p:tgtEl>
+                                        <p:attrNameLst>
+                                          <p:attrName>style.visibility</p:attrName>
+                                        </p:attrNameLst>
+                                      </p:cBhvr>
+                                      <p:to>
+                                        <p:strVal val="visible"/>
+                                      </p:to>
+                                    </p:set>
+                                  </p:childTnLst>
+                                </p:cTn>
+                              </p:par>
+                            </p:childTnLst>
+                          </p:cTn>
+                        </p:par>
+                      </p:childTnLst>
+                    </p:cTn>
+                  </p:par>
+                  <p:par>
+                    <p:cTn id="11" fill="hold">
+                      <p:stCondLst>
+                        <p:cond delay="indefinite"/>
+                      </p:stCondLst>
+                      <p:childTnLst>
+                        <p:par>
+                          <p:cTn id="12" fill="hold">
+                            <p:stCondLst>
+                              <p:cond delay="0"/>
+                            </p:stCondLst>
+                            <p:childTnLst>
+                              <p:par>
+                                <p:cTn id="13" presetID="1" presetClass="entr" presetSubtype="0" fill="hold" nodeType="clickEffect">
+                                  <p:stCondLst>
+                                    <p:cond delay="0"/>
+                                  </p:stCondLst>
+                                  <p:childTnLst>
+                                    <p:set>
+                                      <p:cBhvr>
+                                        <p:cTn id="14" dur="1" fill="hold">
+                                          <p:stCondLst>
+                                            <p:cond delay="0"/>
+                                          </p:stCondLst>
+                                        </p:cTn>
+                                        <p:tgtEl>
+                                          <p:spTgt spid="2">
+                                            <p:txEl>
+                                              <p:pRg st="6" end="6"/>
+                                            </p:txEl>
+                                          </p:spTgt>
+                                        </p:tgtEl>
+                                        <p:attrNameLst>
+                                          <p:attrName>style.visibility</p:attrName>
+                                        </p:attrNameLst>
+                                      </p:cBhvr>
+                                      <p:to>
+                                        <p:strVal val="visible"/>
+                                      </p:to>
+                                    </p:set>
+                                  </p:childTnLst>
+                                </p:cTn>
+                              </p:par>
+                            </p:childTnLst>
+                          </p:cTn>
+                        </p:par>
+                      </p:childTnLst>
+                    </p:cTn>
+                  </p:par>
+                  <p:par>
+                    <p:cTn id="15" fill="hold">
+                      <p:stCondLst>
+                        <p:cond delay="indefinite"/>
+                      </p:stCondLst>
+                      <p:childTnLst>
+                        <p:par>
+                          <p:cTn id="16" fill="hold">
+                            <p:stCondLst>
+                              <p:cond delay="0"/>
+                            </p:stCondLst>
+                            <p:childTnLst>
+                              <p:par>
+                                <p:cTn id="17" presetID="1" presetClass="entr" presetSubtype="0" fill="hold" nodeType="clickEffect">
+                                  <p:stCondLst>
+                                    <p:cond delay="0"/>
+                                  </p:stCondLst>
+                                  <p:childTnLst>
+                                    <p:set>
+                                      <p:cBhvr>
+                                        <p:cTn id="18" dur="1" fill="hold">
+                                          <p:stCondLst>
+                                            <p:cond delay="0"/>
+                                          </p:stCondLst>
+                                        </p:cTn>
+                                        <p:tgtEl>
+                                          <p:spTgt spid="2">
+                                            <p:txEl>
+                                              <p:pRg st="8" end="8"/>
+                                            </p:txEl>
+                                          </p:spTgt>
+                                        </p:tgtEl>
+                                        <p:attrNameLst>
+                                          <p:attrName>style.visibility</p:attrName>
+                                        </p:attrNameLst>
+                                      </p:cBhvr>
+                                      <p:to>
+                                        <p:strVal val="visible"/>
+                                      </p:to>
+                                    </p:set>
+                                  </p:childTnLst>
+                                </p:cTn>
+                              </p:par>
+                            </p:childTnLst>
+                          </p:cTn>
+                        </p:par>
+                      </p:childTnLst>
+                    </p:cTn>
+                  </p:par>
+                </p:childTnLst>
+              </p:cTn>
+              <p:prevCondLst>
+                <p:cond evt="onPrev" delay="0">
+                  <p:tgtEl>
+                    <p:sldTgt/>
+                  </p:tgtEl>
+                </p:cond>
+              </p:prevCondLst>
+              <p:nextCondLst>
+                <p:cond evt="onNext" delay="0">
+                  <p:tgtEl>
+                    <p:sldTgt/>
+                  </p:tgtEl>
+                </p:cond>
+              </p:nextCondLst>
+            </p:seq>
+          </p:childTnLst>
+        </p:cTn>
+      </p:par>
+    </p:tnLst>
+  </p:timing>
 </p:sld>
 </file>
 
@@ -13933,11 +14867,122 @@
                 <a:latin typeface="Calibri" panose="020F0502020204030204" pitchFamily="34" charset="0"/>
                 <a:cs typeface="Calibri" panose="020F0502020204030204" pitchFamily="34" charset="0"/>
               </a:rPr>
-              <a:t>Questions?</a:t>
+              <a:t>Feedback</a:t>
             </a:r>
             <a:endParaRPr sz="3200" dirty="0">
               <a:latin typeface="Calibri" panose="020F0502020204030204" pitchFamily="34" charset="0"/>
               <a:cs typeface="Calibri" panose="020F0502020204030204" pitchFamily="34" charset="0"/>
+            </a:endParaRPr>
+          </a:p>
+        </p:txBody>
+      </p:sp>
+      <p:sp>
+        <p:nvSpPr>
+          <p:cNvPr id="2" name="Google Shape;97;p20">
+            <a:extLst>
+              <a:ext uri="{FF2B5EF4-FFF2-40B4-BE49-F238E27FC236}">
+                <a16:creationId xmlns:a16="http://schemas.microsoft.com/office/drawing/2014/main" id="{DFE6C00B-A7A0-F0ED-113A-50EBACB698C4}"/>
+              </a:ext>
+            </a:extLst>
+          </p:cNvPr>
+          <p:cNvSpPr txBox="1">
+            <a:spLocks noGrp="1"/>
+          </p:cNvSpPr>
+          <p:nvPr>
+            <p:ph type="body" idx="1"/>
+          </p:nvPr>
+        </p:nvSpPr>
+        <p:spPr>
+          <a:xfrm>
+            <a:off x="311700" y="1130530"/>
+            <a:ext cx="8832300" cy="4010691"/>
+          </a:xfrm>
+          <a:prstGeom prst="rect">
+            <a:avLst/>
+          </a:prstGeom>
+        </p:spPr>
+        <p:txBody>
+          <a:bodyPr spcFirstLastPara="1" wrap="square" lIns="91425" tIns="91425" rIns="91425" bIns="91425" anchor="t" anchorCtr="0">
+            <a:noAutofit/>
+          </a:bodyPr>
+          <a:lstStyle/>
+          <a:p>
+            <a:pPr marL="114300" indent="0">
+              <a:buNone/>
+            </a:pPr>
+            <a:r>
+              <a:rPr lang="en-US" sz="2200" dirty="0">
+                <a:solidFill>
+                  <a:schemeClr val="tx1"/>
+                </a:solidFill>
+              </a:rPr>
+              <a:t>LU Evaluation: The official forms are not ready …</a:t>
+            </a:r>
+          </a:p>
+          <a:p>
+            <a:pPr marL="114300" indent="0">
+              <a:buNone/>
+            </a:pPr>
+            <a:endParaRPr lang="en-US" sz="2200" dirty="0">
+              <a:solidFill>
+                <a:schemeClr val="tx1"/>
+              </a:solidFill>
+            </a:endParaRPr>
+          </a:p>
+          <a:p>
+            <a:pPr marL="114300" indent="0">
+              <a:buNone/>
+            </a:pPr>
+            <a:r>
+              <a:rPr lang="en-US" sz="2200" dirty="0">
+                <a:solidFill>
+                  <a:schemeClr val="tx1"/>
+                </a:solidFill>
+              </a:rPr>
+              <a:t>Please watch out for them and give feedback.</a:t>
+            </a:r>
+          </a:p>
+          <a:p>
+            <a:pPr marL="114300" indent="0">
+              <a:buNone/>
+            </a:pPr>
+            <a:endParaRPr lang="en-US" sz="2200" dirty="0">
+              <a:solidFill>
+                <a:schemeClr val="tx1"/>
+              </a:solidFill>
+            </a:endParaRPr>
+          </a:p>
+          <a:p>
+            <a:pPr marL="114300" indent="0">
+              <a:buNone/>
+            </a:pPr>
+            <a:r>
+              <a:rPr lang="en-US" sz="2200" dirty="0">
+                <a:solidFill>
+                  <a:schemeClr val="tx1"/>
+                </a:solidFill>
+              </a:rPr>
+              <a:t>... Is there anything you want to discuss right now?</a:t>
+            </a:r>
+          </a:p>
+          <a:p>
+            <a:pPr marL="114300" indent="0">
+              <a:buNone/>
+            </a:pPr>
+            <a:endParaRPr lang="en-US" sz="2000" dirty="0">
+              <a:solidFill>
+                <a:srgbClr val="72AF2F"/>
+              </a:solidFill>
+            </a:endParaRPr>
+          </a:p>
+          <a:p>
+            <a:pPr marL="1074738" indent="0">
+              <a:buNone/>
+            </a:pPr>
+            <a:endParaRPr lang="en-US" sz="2000" dirty="0">
+              <a:solidFill>
+                <a:srgbClr val="72AF2F"/>
+              </a:solidFill>
             </a:endParaRPr>
           </a:p>
         </p:txBody>
@@ -13945,13 +14990,144 @@
     </p:spTree>
     <p:extLst>
       <p:ext uri="{BB962C8B-B14F-4D97-AF65-F5344CB8AC3E}">
-        <p14:creationId xmlns:p14="http://schemas.microsoft.com/office/powerpoint/2010/main" val="715637687"/>
+        <p14:creationId xmlns:p14="http://schemas.microsoft.com/office/powerpoint/2010/main" val="2367668795"/>
       </p:ext>
     </p:extLst>
   </p:cSld>
   <p:clrMapOvr>
     <a:masterClrMapping/>
   </p:clrMapOvr>
+  <p:transition spd="slow">
+    <p:push dir="d"/>
+  </p:transition>
+  <p:timing>
+    <p:tnLst>
+      <p:par>
+        <p:cTn id="1" dur="indefinite" restart="never" nodeType="tmRoot">
+          <p:childTnLst>
+            <p:seq concurrent="1" nextAc="seek">
+              <p:cTn id="2" dur="indefinite" nodeType="mainSeq">
+                <p:childTnLst>
+                  <p:par>
+                    <p:cTn id="3" fill="hold">
+                      <p:stCondLst>
+                        <p:cond delay="indefinite"/>
+                      </p:stCondLst>
+                      <p:childTnLst>
+                        <p:par>
+                          <p:cTn id="4" fill="hold">
+                            <p:stCondLst>
+                              <p:cond delay="0"/>
+                            </p:stCondLst>
+                            <p:childTnLst>
+                              <p:par>
+                                <p:cTn id="5" presetID="1" presetClass="entr" presetSubtype="0" fill="hold" nodeType="clickEffect">
+                                  <p:stCondLst>
+                                    <p:cond delay="0"/>
+                                  </p:stCondLst>
+                                  <p:childTnLst>
+                                    <p:set>
+                                      <p:cBhvr>
+                                        <p:cTn id="6" dur="1" fill="hold">
+                                          <p:stCondLst>
+                                            <p:cond delay="0"/>
+                                          </p:stCondLst>
+                                        </p:cTn>
+                                        <p:tgtEl>
+                                          <p:spTgt spid="2">
+                                            <p:txEl>
+                                              <p:pRg st="2" end="2"/>
+                                            </p:txEl>
+                                          </p:spTgt>
+                                        </p:tgtEl>
+                                        <p:attrNameLst>
+                                          <p:attrName>style.visibility</p:attrName>
+                                        </p:attrNameLst>
+                                      </p:cBhvr>
+                                      <p:to>
+                                        <p:strVal val="visible"/>
+                                      </p:to>
+                                    </p:set>
+                                  </p:childTnLst>
+                                </p:cTn>
+                              </p:par>
+                            </p:childTnLst>
+                          </p:cTn>
+                        </p:par>
+                      </p:childTnLst>
+                    </p:cTn>
+                  </p:par>
+                  <p:par>
+                    <p:cTn id="7" fill="hold">
+                      <p:stCondLst>
+                        <p:cond delay="indefinite"/>
+                      </p:stCondLst>
+                      <p:childTnLst>
+                        <p:par>
+                          <p:cTn id="8" fill="hold">
+                            <p:stCondLst>
+                              <p:cond delay="0"/>
+                            </p:stCondLst>
+                            <p:childTnLst>
+                              <p:par>
+                                <p:cTn id="9" presetID="1" presetClass="entr" presetSubtype="0" fill="hold" nodeType="clickEffect">
+                                  <p:stCondLst>
+                                    <p:cond delay="0"/>
+                                  </p:stCondLst>
+                                  <p:childTnLst>
+                                    <p:set>
+                                      <p:cBhvr>
+                                        <p:cTn id="10" dur="1" fill="hold">
+                                          <p:stCondLst>
+                                            <p:cond delay="0"/>
+                                          </p:stCondLst>
+                                        </p:cTn>
+                                        <p:tgtEl>
+                                          <p:spTgt spid="2">
+                                            <p:txEl>
+                                              <p:pRg st="4" end="4"/>
+                                            </p:txEl>
+                                          </p:spTgt>
+                                        </p:tgtEl>
+                                        <p:attrNameLst>
+                                          <p:attrName>style.visibility</p:attrName>
+                                        </p:attrNameLst>
+                                      </p:cBhvr>
+                                      <p:to>
+                                        <p:strVal val="visible"/>
+                                      </p:to>
+                                    </p:set>
+                                  </p:childTnLst>
+                                </p:cTn>
+                              </p:par>
+                            </p:childTnLst>
+                          </p:cTn>
+                        </p:par>
+                      </p:childTnLst>
+                    </p:cTn>
+                  </p:par>
+                </p:childTnLst>
+              </p:cTn>
+              <p:prevCondLst>
+                <p:cond evt="onPrev" delay="0">
+                  <p:tgtEl>
+                    <p:sldTgt/>
+                  </p:tgtEl>
+                </p:cond>
+              </p:prevCondLst>
+              <p:nextCondLst>
+                <p:cond evt="onNext" delay="0">
+                  <p:tgtEl>
+                    <p:sldTgt/>
+                  </p:tgtEl>
+                </p:cond>
+              </p:nextCondLst>
+            </p:seq>
+          </p:childTnLst>
+        </p:cTn>
+      </p:par>
+    </p:tnLst>
+  </p:timing>
 </p:sld>
 </file>
 
@@ -16550,21 +17726,6 @@
             </a:r>
           </a:p>
           <a:p>
-            <a:pPr>
-              <a:buClr>
-                <a:schemeClr val="bg1"/>
-              </a:buClr>
-            </a:pPr>
-            <a:r>
-              <a:rPr lang="en-US" sz="2000" dirty="0">
-                <a:solidFill>
-                  <a:schemeClr val="bg1"/>
-                </a:solidFill>
-              </a:rPr>
-              <a:t>Sometimes you need to improvise.</a:t>
-            </a:r>
-          </a:p>
-          <a:p>
             <a:pPr marL="114300" indent="0">
               <a:buClr>
                 <a:schemeClr val="bg1"/>
@@ -16760,56 +17921,7 @@
                                         <p:tgtEl>
                                           <p:spTgt spid="4">
                                             <p:txEl>
-                                              <p:pRg st="6" end="6"/>
-                                            </p:txEl>
-                                          </p:spTgt>
-                                        </p:tgtEl>
-                                        <p:attrNameLst>
-                                          <p:attrName>style.visibility</p:attrName>
-                                        </p:attrNameLst>
-                                      </p:cBhvr>
-                                      <p:to>
-                                        <p:strVal val="visible"/>
-                                      </p:to>
-                                    </p:set>
-                                  </p:childTnLst>
-                                </p:cTn>
-                              </p:par>
-                            </p:childTnLst>
-                          </p:cTn>
-                        </p:par>
-                      </p:childTnLst>
-                    </p:cTn>
-                  </p:par>
-                  <p:par>
-                    <p:cTn id="15" fill="hold">
-                      <p:stCondLst>
-                        <p:cond delay="indefinite"/>
-                      </p:stCondLst>
-                      <p:childTnLst>
-                        <p:par>
-                          <p:cTn id="16" fill="hold">
-                            <p:stCondLst>
-                              <p:cond delay="0"/>
-                            </p:stCondLst>
-                            <p:childTnLst>
-                              <p:par>
-                                <p:cTn id="17" presetID="1" presetClass="entr" presetSubtype="0" fill="hold" nodeType="clickEffect">
-                                  <p:stCondLst>
-                                    <p:cond delay="0"/>
-                                  </p:stCondLst>
-                                  <p:childTnLst>
-                                    <p:set>
-                                      <p:cBhvr>
-                                        <p:cTn id="18" dur="1" fill="hold">
-                                          <p:stCondLst>
-                                            <p:cond delay="0"/>
-                                          </p:stCondLst>
-                                        </p:cTn>
-                                        <p:tgtEl>
-                                          <p:spTgt spid="4">
-                                            <p:txEl>
-                                              <p:pRg st="8" end="8"/>
+                                              <p:pRg st="7" end="7"/>
                                             </p:txEl>
                                           </p:spTgt>
                                         </p:tgtEl>
